--- a/classes/field_assignments/files/lockdown-at-home-presentation-template.pptx
+++ b/classes/field_assignments/files/lockdown-at-home-presentation-template.pptx
@@ -74,7 +74,7 @@
         <p:txBody>
           <a:bodyPr/>
           <a:p>
-            <a:fld id="{E53EC013-050C-45E7-80BC-2ADB141227D0}" type="slidenum">
+            <a:fld id="{78B1C9ED-573F-45EB-8BF5-818618B868C0}" type="slidenum">
               <a:t>&lt;#&gt;</a:t>
             </a:fld>
           </a:p>
@@ -237,7 +237,7 @@
         <p:txBody>
           <a:bodyPr/>
           <a:p>
-            <a:fld id="{520FE8D8-7369-4C6D-BFD2-D2B533BA790B}" type="slidenum">
+            <a:fld id="{B66E06DA-F4DE-4B66-B518-5BEF72AAEC39}" type="slidenum">
               <a:t>&lt;#&gt;</a:t>
             </a:fld>
           </a:p>
@@ -722,7 +722,7 @@
             <a:pPr indent="0" algn="r">
               <a:buNone/>
             </a:pPr>
-            <a:fld id="{B9CFA077-C6C3-49AA-BEFA-BA4B736BFE81}" type="slidenum">
+            <a:fld id="{405F7B64-CAD6-401B-A13A-C7811AAA5D58}" type="slidenum">
               <a:rPr b="0" lang="en-US" sz="1400" spc="-1" strike="noStrike">
                 <a:solidFill>
                   <a:srgbClr val="000000"/>
@@ -1160,7 +1160,7 @@
                 </a:solidFill>
                 <a:latin typeface="Arial"/>
               </a:rPr>
-              <a:t>DELETE THIS NOTE</a:t>
+              <a:t>VISUAL</a:t>
             </a:r>
             <a:endParaRPr b="0" lang="en-US" sz="1400" spc="-1" strike="noStrike">
               <a:solidFill>
@@ -1177,7 +1177,7 @@
                 </a:solidFill>
                 <a:latin typeface="Arial"/>
               </a:rPr>
-              <a:t>Use your own photo, icon, or simple graphic here—or leave the space open.</a:t>
+              <a:t>Photo, icon, or simple graphic</a:t>
             </a:r>
             <a:endParaRPr b="0" lang="en-US" sz="1400" spc="-1" strike="noStrike">
               <a:solidFill>
@@ -3540,31 +3540,6 @@
               <a:latin typeface="Arial"/>
             </a:endParaRPr>
           </a:p>
-          <a:p>
-            <a:endParaRPr b="0" lang="en-US" sz="1900" spc="-1" strike="noStrike">
-              <a:solidFill>
-                <a:srgbClr val="18211b"/>
-              </a:solidFill>
-              <a:latin typeface="Arial"/>
-            </a:endParaRPr>
-          </a:p>
-          <a:p>
-            <a:r>
-              <a:rPr b="0" lang="en-US" sz="1900" spc="-1" strike="noStrike">
-                <a:solidFill>
-                  <a:srgbClr val="18211b"/>
-                </a:solidFill>
-                <a:latin typeface="Arial"/>
-              </a:rPr>
-              <a:t>Delete this guidance before presenting.</a:t>
-            </a:r>
-            <a:endParaRPr b="0" lang="en-US" sz="1900" spc="-1" strike="noStrike">
-              <a:solidFill>
-                <a:srgbClr val="18211b"/>
-              </a:solidFill>
-              <a:latin typeface="Arial"/>
-            </a:endParaRPr>
-          </a:p>
         </p:txBody>
       </p:sp>
     </p:spTree>
@@ -4088,7 +4063,7 @@
                 </a:solidFill>
                 <a:latin typeface="Arial"/>
               </a:rPr>
-              <a:t>Optional visual: add a simple timeline or five-bar comparison. Do not paste the entire workbook onto this slide.</a:t>
+              <a:t>Evidence to show: a simple timeline or five-bar comparison.</a:t>
             </a:r>
             <a:endParaRPr b="0" lang="en-US" sz="1600" spc="-1" strike="noStrike">
               <a:solidFill>
@@ -4528,7 +4503,7 @@
                 </a:solidFill>
                 <a:latin typeface="Arial"/>
               </a:rPr>
-              <a:t>Suggested visual: container icons or one bar.</a:t>
+              <a:t>Evidence: container icons or one bar.</a:t>
             </a:r>
             <a:endParaRPr b="0" lang="en-US" sz="1900" spc="-1" strike="noStrike">
               <a:solidFill>
@@ -4700,7 +4675,7 @@
                 </a:solidFill>
                 <a:latin typeface="Arial"/>
               </a:rPr>
-              <a:t>Suggested visual: categories, not every item.</a:t>
+              <a:t>Evidence: categories, not every item.</a:t>
             </a:r>
             <a:endParaRPr b="0" lang="en-US" sz="1900" spc="-1" strike="noStrike">
               <a:solidFill>
@@ -6046,7 +6021,7 @@
                 </a:solidFill>
                 <a:latin typeface="Arial"/>
               </a:rPr>
-              <a:t>Choose short phrases, a flowchart, or a table. You do not have to keep these three boxes.</a:t>
+              <a:t>Use short phrases, a flowchart, or a table.</a:t>
             </a:r>
             <a:endParaRPr b="0" lang="en-US" sz="1600" spc="-1" strike="noStrike">
               <a:solidFill>
